--- a/docs/grant-deck-2026-09-25.pptx
+++ b/docs/grant-deck-2026-09-25.pptx
@@ -3272,7 +3272,7 @@
                 </a:solidFill>
                 <a:latin typeface="Calibri"/>
               </a:rPr>
-              <a:t>High Tech Mortgage, Inc. · California · Idaho · Metro Manila · live on XRP Ledger Mainnet since September 24, 2026</a:t>
+              <a:t>High Tech Mortgage, LLC · California · Idaho · Metro Manila · Switzerland opening soon · live on XRP Ledger Mainnet since September 24, 2026</a:t>
             </a:r>
           </a:p>
         </p:txBody>
@@ -3483,7 +3483,7 @@
                 </a:solidFill>
                 <a:latin typeface="Calibri"/>
               </a:rPr>
-              <a:t>High Tech Mortgage, Inc. · MortgageOS™ tokenization + servicing layer v3.1 · XRPL Grants proposal · September 11, 2026 · github.com/vanfwilson/xrpl-mortgage-tokenizing-htm</a:t>
+              <a:t>High Tech Mortgage, LLC · MortgageOS™ tokenization + servicing layer · XRPL Grants proposal · September 11, 2026 · github.com/vanfwilson/xrpl-mortgage-tokenizing-htm</a:t>
             </a:r>
           </a:p>
         </p:txBody>
@@ -3522,7 +3522,7 @@
                 </a:solidFill>
                 <a:latin typeface="Calibri"/>
               </a:rPr>
-              <a:t>•  High Tech Mortgage, Inc.: licensed California mortgage broker (DFPI and DRE) with offices in California, Idaho and Metro Manila, a Swiss office opening soon, and Manila as the operations centre.</a:t>
+              <a:t>•  High Tech Mortgage, LLC: licensed California mortgage broker (DRE #01106294, NMLS #291547) with offices in California, Idaho and Metro Manila, a Swiss office opening soon, and Manila as the operations centre.</a:t>
             </a:r>
           </a:p>
           <a:p>
@@ -4123,7 +4123,7 @@
                 </a:solidFill>
                 <a:latin typeface="Calibri"/>
               </a:rPr>
-              <a:t>High Tech Mortgage, Inc. · MortgageOS™ tokenization + servicing layer v3.1 · XRPL Grants proposal · September 11, 2026 · github.com/vanfwilson/xrpl-mortgage-tokenizing-htm</a:t>
+              <a:t>High Tech Mortgage, LLC · MortgageOS™ tokenization + servicing layer · XRPL Grants proposal · September 11, 2026 · github.com/vanfwilson/xrpl-mortgage-tokenizing-htm</a:t>
             </a:r>
           </a:p>
         </p:txBody>
@@ -5082,7 +5082,7 @@
                 </a:solidFill>
                 <a:latin typeface="Calibri"/>
               </a:rPr>
-              <a:t>High Tech Mortgage, Inc. · MortgageOS™ tokenization + servicing layer v3.1 · XRPL Grants proposal · September 11, 2026 · github.com/vanfwilson/xrpl-mortgage-tokenizing-htm</a:t>
+              <a:t>High Tech Mortgage, LLC · MortgageOS™ tokenization + servicing layer · XRPL Grants proposal · September 11, 2026 · github.com/vanfwilson/xrpl-mortgage-tokenizing-htm</a:t>
             </a:r>
           </a:p>
         </p:txBody>
@@ -6070,7 +6070,7 @@
                 </a:solidFill>
                 <a:latin typeface="Calibri"/>
               </a:rPr>
-              <a:t>High Tech Mortgage, Inc. · MortgageOS™ tokenization + servicing layer v3.1 · XRPL Grants proposal · September 11, 2026 · github.com/vanfwilson/xrpl-mortgage-tokenizing-htm</a:t>
+              <a:t>High Tech Mortgage, LLC · MortgageOS™ tokenization + servicing layer · XRPL Grants proposal · September 11, 2026 · github.com/vanfwilson/xrpl-mortgage-tokenizing-htm</a:t>
             </a:r>
           </a:p>
         </p:txBody>
@@ -6448,7 +6448,7 @@
                 </a:solidFill>
                 <a:latin typeface="Calibri"/>
               </a:rPr>
-              <a:t>High Tech Mortgage, Inc. · MortgageOS™ tokenization + servicing layer v3.1 · XRPL Grants proposal · September 11, 2026 · github.com/vanfwilson/xrpl-mortgage-tokenizing-htm</a:t>
+              <a:t>High Tech Mortgage, LLC · MortgageOS™ tokenization + servicing layer · XRPL Grants proposal · September 11, 2026 · github.com/vanfwilson/xrpl-mortgage-tokenizing-htm</a:t>
             </a:r>
           </a:p>
         </p:txBody>
@@ -7559,7 +7559,7 @@
                 </a:solidFill>
                 <a:latin typeface="Calibri"/>
               </a:rPr>
-              <a:t>High Tech Mortgage, Inc. · MortgageOS™ tokenization + servicing layer v3.1 · XRPL Grants proposal · September 11, 2026 · github.com/vanfwilson/xrpl-mortgage-tokenizing-htm</a:t>
+              <a:t>High Tech Mortgage, LLC · MortgageOS™ tokenization + servicing layer · XRPL Grants proposal · September 11, 2026 · github.com/vanfwilson/xrpl-mortgage-tokenizing-htm</a:t>
             </a:r>
           </a:p>
         </p:txBody>
@@ -7744,7 +7744,7 @@
                 </a:solidFill>
                 <a:latin typeface="Calibri"/>
               </a:rPr>
-              <a:t>High Tech Mortgage, Inc. · 730 I Street, Sacramento, CA 95814 · 19F Marco Polo Ortigas, Pasig City, Metro Manila · info@hightechmortgage.com</a:t>
+              <a:t>High Tech Mortgage, LLC · 730 I Street, Sacramento, CA 95814 · 19F Marco Polo Ortigas, Pasig City, Metro Manila · info@hightechmortgage.com</a:t>
             </a:r>
           </a:p>
         </p:txBody>
@@ -7955,7 +7955,7 @@
                 </a:solidFill>
                 <a:latin typeface="Calibri"/>
               </a:rPr>
-              <a:t>High Tech Mortgage, Inc. · MortgageOS™ tokenization + servicing layer v3.1 · XRPL Grants proposal · September 11, 2026 · github.com/vanfwilson/xrpl-mortgage-tokenizing-htm</a:t>
+              <a:t>High Tech Mortgage, LLC · MortgageOS™ tokenization + servicing layer · XRPL Grants proposal · September 11, 2026 · github.com/vanfwilson/xrpl-mortgage-tokenizing-htm</a:t>
             </a:r>
           </a:p>
         </p:txBody>
@@ -8451,7 +8451,7 @@
                 </a:solidFill>
                 <a:latin typeface="Calibri"/>
               </a:rPr>
-              <a:t>High Tech Mortgage, Inc. · MortgageOS™ tokenization + servicing layer v3.1 · XRPL Grants proposal · September 11, 2026 · github.com/vanfwilson/xrpl-mortgage-tokenizing-htm</a:t>
+              <a:t>High Tech Mortgage, LLC · MortgageOS™ tokenization + servicing layer · XRPL Grants proposal · September 11, 2026 · github.com/vanfwilson/xrpl-mortgage-tokenizing-htm</a:t>
             </a:r>
           </a:p>
         </p:txBody>
@@ -9502,7 +9502,7 @@
                 </a:solidFill>
                 <a:latin typeface="Calibri"/>
               </a:rPr>
-              <a:t>High Tech Mortgage, Inc. · MortgageOS™ tokenization + servicing layer v3.1 · XRPL Grants proposal · September 11, 2026 · github.com/vanfwilson/xrpl-mortgage-tokenizing-htm</a:t>
+              <a:t>High Tech Mortgage, LLC · MortgageOS™ tokenization + servicing layer · XRPL Grants proposal · September 11, 2026 · github.com/vanfwilson/xrpl-mortgage-tokenizing-htm</a:t>
             </a:r>
           </a:p>
         </p:txBody>
@@ -10045,7 +10045,7 @@
                 </a:solidFill>
                 <a:latin typeface="Calibri"/>
               </a:rPr>
-              <a:t>High Tech Mortgage, Inc. · MortgageOS™ tokenization + servicing layer v3.1 · XRPL Grants proposal · September 11, 2026 · github.com/vanfwilson/xrpl-mortgage-tokenizing-htm</a:t>
+              <a:t>High Tech Mortgage, LLC · MortgageOS™ tokenization + servicing layer · XRPL Grants proposal · September 11, 2026 · github.com/vanfwilson/xrpl-mortgage-tokenizing-htm</a:t>
             </a:r>
           </a:p>
         </p:txBody>
@@ -10878,7 +10878,7 @@
                 </a:solidFill>
                 <a:latin typeface="Calibri"/>
               </a:rPr>
-              <a:t>High Tech Mortgage, Inc. · MortgageOS™ tokenization + servicing layer v3.1 · XRPL Grants proposal · September 11, 2026 · github.com/vanfwilson/xrpl-mortgage-tokenizing-htm</a:t>
+              <a:t>High Tech Mortgage, LLC · MortgageOS™ tokenization + servicing layer · XRPL Grants proposal · September 11, 2026 · github.com/vanfwilson/xrpl-mortgage-tokenizing-htm</a:t>
             </a:r>
           </a:p>
         </p:txBody>
@@ -11616,7 +11616,7 @@
                 </a:solidFill>
                 <a:latin typeface="Calibri"/>
               </a:rPr>
-              <a:t>High Tech Mortgage, Inc. · MortgageOS™ tokenization + servicing layer v3.1 · XRPL Grants proposal · September 11, 2026 · github.com/vanfwilson/xrpl-mortgage-tokenizing-htm</a:t>
+              <a:t>High Tech Mortgage, LLC · MortgageOS™ tokenization + servicing layer · XRPL Grants proposal · September 11, 2026 · github.com/vanfwilson/xrpl-mortgage-tokenizing-htm</a:t>
             </a:r>
           </a:p>
         </p:txBody>
@@ -12297,7 +12297,7 @@
                 </a:solidFill>
                 <a:latin typeface="Calibri"/>
               </a:rPr>
-              <a:t>High Tech Mortgage, Inc. · MortgageOS™ tokenization + servicing layer v3.1 · XRPL Grants proposal · September 11, 2026 · github.com/vanfwilson/xrpl-mortgage-tokenizing-htm</a:t>
+              <a:t>High Tech Mortgage, LLC · MortgageOS™ tokenization + servicing layer · XRPL Grants proposal · September 11, 2026 · github.com/vanfwilson/xrpl-mortgage-tokenizing-htm</a:t>
             </a:r>
           </a:p>
         </p:txBody>
@@ -12761,7 +12761,7 @@
                 </a:solidFill>
                 <a:latin typeface="Calibri"/>
               </a:rPr>
-              <a:t>High Tech Mortgage, Inc. · MortgageOS™ tokenization + servicing layer v3.1 · XRPL Grants proposal · September 11, 2026 · github.com/vanfwilson/xrpl-mortgage-tokenizing-htm</a:t>
+              <a:t>High Tech Mortgage, LLC · MortgageOS™ tokenization + servicing layer · XRPL Grants proposal · September 11, 2026 · github.com/vanfwilson/xrpl-mortgage-tokenizing-htm</a:t>
             </a:r>
           </a:p>
         </p:txBody>
